--- a/wwwroot/TheMmainLineofEducationalComputingThinking.pptx
+++ b/wwwroot/TheMmainLineofEducationalComputingThinking.pptx
@@ -239,7 +239,7 @@
           <a:p>
             <a:fld id="{0F9B84EA-7D68-4D60-9CB1-D50884785D1C}" type="datetimeFigureOut">
               <a:rPr lang="zh-CN" altLang="en-US" smtClean="0"/>
-              <a:t>2023/3/9</a:t>
+              <a:t>2023/3/11</a:t>
             </a:fld>
             <a:endParaRPr lang="zh-CN" altLang="en-US"/>
           </a:p>
@@ -404,7 +404,7 @@
           <a:p>
             <a:fld id="{D2A48B96-639E-45A3-A0BA-2464DFDB1FAA}" type="datetimeFigureOut">
               <a:rPr lang="zh-CN" altLang="en-US" smtClean="0"/>
-              <a:t>2023/3/9</a:t>
+              <a:t>2023/3/11</a:t>
             </a:fld>
             <a:endParaRPr lang="zh-CN" altLang="en-US"/>
           </a:p>
@@ -799,7 +799,19 @@
           <a:bodyPr/>
           <a:lstStyle/>
           <a:p>
-            <a:endParaRPr lang="zh-CN" altLang="en-US"/>
+            <a:r>
+              <a:rPr lang="zh-CN" altLang="en-US" dirty="0" smtClean="0"/>
+              <a:t>第</a:t>
+            </a:r>
+            <a:r>
+              <a:rPr lang="en-US" altLang="zh-CN" dirty="0" smtClean="0"/>
+              <a:t>0</a:t>
+            </a:r>
+            <a:r>
+              <a:rPr lang="zh-CN" altLang="en-US" dirty="0" smtClean="0"/>
+              <a:t>分钟</a:t>
+            </a:r>
+            <a:endParaRPr lang="zh-CN" altLang="en-US" dirty="0"/>
           </a:p>
         </p:txBody>
       </p:sp>
@@ -883,7 +895,19 @@
           <a:bodyPr/>
           <a:lstStyle/>
           <a:p>
-            <a:endParaRPr lang="zh-CN" altLang="en-US"/>
+            <a:r>
+              <a:rPr lang="zh-CN" altLang="en-US" dirty="0" smtClean="0"/>
+              <a:t>第</a:t>
+            </a:r>
+            <a:r>
+              <a:rPr lang="en-US" altLang="zh-CN" dirty="0" smtClean="0"/>
+              <a:t>2</a:t>
+            </a:r>
+            <a:r>
+              <a:rPr lang="zh-CN" altLang="en-US" dirty="0" smtClean="0"/>
+              <a:t>分钟</a:t>
+            </a:r>
+            <a:endParaRPr lang="zh-CN" altLang="en-US" dirty="0"/>
           </a:p>
         </p:txBody>
       </p:sp>
@@ -967,7 +991,19 @@
           <a:bodyPr/>
           <a:lstStyle/>
           <a:p>
-            <a:endParaRPr lang="zh-CN" altLang="en-US"/>
+            <a:r>
+              <a:rPr lang="zh-CN" altLang="en-US" dirty="0" smtClean="0"/>
+              <a:t>第</a:t>
+            </a:r>
+            <a:r>
+              <a:rPr lang="en-US" altLang="zh-CN" dirty="0" smtClean="0"/>
+              <a:t>5</a:t>
+            </a:r>
+            <a:r>
+              <a:rPr lang="zh-CN" altLang="en-US" dirty="0" smtClean="0"/>
+              <a:t>分钟</a:t>
+            </a:r>
+            <a:endParaRPr lang="zh-CN" altLang="en-US" dirty="0"/>
           </a:p>
         </p:txBody>
       </p:sp>
@@ -1051,7 +1087,19 @@
           <a:bodyPr/>
           <a:lstStyle/>
           <a:p>
-            <a:endParaRPr lang="zh-CN" altLang="en-US"/>
+            <a:r>
+              <a:rPr lang="zh-CN" altLang="en-US" dirty="0" smtClean="0"/>
+              <a:t>第</a:t>
+            </a:r>
+            <a:r>
+              <a:rPr lang="en-US" altLang="zh-CN" dirty="0" smtClean="0"/>
+              <a:t>15</a:t>
+            </a:r>
+            <a:r>
+              <a:rPr lang="zh-CN" altLang="en-US" dirty="0" smtClean="0"/>
+              <a:t>分钟</a:t>
+            </a:r>
+            <a:endParaRPr lang="zh-CN" altLang="en-US" dirty="0"/>
           </a:p>
         </p:txBody>
       </p:sp>
@@ -1135,7 +1183,19 @@
           <a:bodyPr/>
           <a:lstStyle/>
           <a:p>
-            <a:endParaRPr lang="zh-CN" altLang="en-US"/>
+            <a:r>
+              <a:rPr lang="zh-CN" altLang="en-US" dirty="0" smtClean="0"/>
+              <a:t>第</a:t>
+            </a:r>
+            <a:r>
+              <a:rPr lang="en-US" altLang="zh-CN" dirty="0" smtClean="0"/>
+              <a:t>30</a:t>
+            </a:r>
+            <a:r>
+              <a:rPr lang="zh-CN" altLang="en-US" dirty="0" smtClean="0"/>
+              <a:t>分钟</a:t>
+            </a:r>
+            <a:endParaRPr lang="zh-CN" altLang="en-US" dirty="0"/>
           </a:p>
         </p:txBody>
       </p:sp>
@@ -1219,7 +1279,19 @@
           <a:bodyPr/>
           <a:lstStyle/>
           <a:p>
-            <a:endParaRPr lang="zh-CN" altLang="en-US"/>
+            <a:r>
+              <a:rPr lang="zh-CN" altLang="en-US" dirty="0" smtClean="0"/>
+              <a:t>第</a:t>
+            </a:r>
+            <a:r>
+              <a:rPr lang="en-US" altLang="zh-CN" dirty="0" smtClean="0"/>
+              <a:t>35</a:t>
+            </a:r>
+            <a:r>
+              <a:rPr lang="zh-CN" altLang="en-US" dirty="0" smtClean="0"/>
+              <a:t>分钟</a:t>
+            </a:r>
+            <a:endParaRPr lang="zh-CN" altLang="en-US" dirty="0"/>
           </a:p>
         </p:txBody>
       </p:sp>
@@ -1303,7 +1375,27 @@
           <a:bodyPr/>
           <a:lstStyle/>
           <a:p>
-            <a:endParaRPr lang="zh-CN" altLang="en-US"/>
+            <a:r>
+              <a:rPr lang="zh-CN" altLang="en-US" dirty="0" smtClean="0"/>
+              <a:t>第</a:t>
+            </a:r>
+            <a:r>
+              <a:rPr lang="en-US" altLang="zh-CN" dirty="0" smtClean="0"/>
+              <a:t>37</a:t>
+            </a:r>
+            <a:r>
+              <a:rPr lang="zh-CN" altLang="en-US" dirty="0" smtClean="0"/>
+              <a:t>分钟</a:t>
+            </a:r>
+            <a:r>
+              <a:rPr lang="en-US" altLang="zh-CN" dirty="0" smtClean="0"/>
+              <a:t>~40</a:t>
+            </a:r>
+            <a:r>
+              <a:rPr lang="zh-CN" altLang="en-US" dirty="0" smtClean="0"/>
+              <a:t>分钟</a:t>
+            </a:r>
+            <a:endParaRPr lang="zh-CN" altLang="en-US" dirty="0"/>
           </a:p>
         </p:txBody>
       </p:sp>
@@ -1556,7 +1648,7 @@
           <a:p>
             <a:fld id="{82F288E0-7875-42C4-84C8-98DBBD3BF4D2}" type="datetimeFigureOut">
               <a:rPr lang="zh-CN" altLang="en-US" smtClean="0"/>
-              <a:t>2023/3/9</a:t>
+              <a:t>2023/3/11</a:t>
             </a:fld>
             <a:endParaRPr lang="zh-CN" altLang="en-US"/>
           </a:p>
@@ -1714,7 +1806,7 @@
           <a:p>
             <a:fld id="{82F288E0-7875-42C4-84C8-98DBBD3BF4D2}" type="datetimeFigureOut">
               <a:rPr lang="zh-CN" altLang="en-US" smtClean="0"/>
-              <a:t>2023/3/9</a:t>
+              <a:t>2023/3/11</a:t>
             </a:fld>
             <a:endParaRPr lang="zh-CN" altLang="en-US"/>
           </a:p>
@@ -2053,7 +2145,7 @@
           <a:p>
             <a:fld id="{82F288E0-7875-42C4-84C8-98DBBD3BF4D2}" type="datetimeFigureOut">
               <a:rPr lang="zh-CN" altLang="en-US" smtClean="0"/>
-              <a:t>2023/3/9</a:t>
+              <a:t>2023/3/11</a:t>
             </a:fld>
             <a:endParaRPr lang="zh-CN" altLang="en-US"/>
           </a:p>
@@ -2289,7 +2381,7 @@
           <a:p>
             <a:fld id="{82F288E0-7875-42C4-84C8-98DBBD3BF4D2}" type="datetimeFigureOut">
               <a:rPr lang="zh-CN" altLang="en-US" smtClean="0"/>
-              <a:t>2023/3/9</a:t>
+              <a:t>2023/3/11</a:t>
             </a:fld>
             <a:endParaRPr lang="zh-CN" altLang="en-US"/>
           </a:p>
@@ -2660,7 +2752,7 @@
           <a:p>
             <a:fld id="{82F288E0-7875-42C4-84C8-98DBBD3BF4D2}" type="datetimeFigureOut">
               <a:rPr lang="zh-CN" altLang="en-US" smtClean="0"/>
-              <a:t>2023/3/9</a:t>
+              <a:t>2023/3/11</a:t>
             </a:fld>
             <a:endParaRPr lang="zh-CN" altLang="en-US"/>
           </a:p>
@@ -2784,7 +2876,7 @@
           <a:p>
             <a:fld id="{82F288E0-7875-42C4-84C8-98DBBD3BF4D2}" type="datetimeFigureOut">
               <a:rPr lang="zh-CN" altLang="en-US" smtClean="0"/>
-              <a:t>2023/3/9</a:t>
+              <a:t>2023/3/11</a:t>
             </a:fld>
             <a:endParaRPr lang="zh-CN" altLang="en-US"/>
           </a:p>
@@ -2886,7 +2978,7 @@
           <a:p>
             <a:fld id="{82F288E0-7875-42C4-84C8-98DBBD3BF4D2}" type="datetimeFigureOut">
               <a:rPr lang="zh-CN" altLang="en-US" smtClean="0"/>
-              <a:t>2023/3/9</a:t>
+              <a:t>2023/3/11</a:t>
             </a:fld>
             <a:endParaRPr lang="zh-CN" altLang="en-US"/>
           </a:p>
@@ -3145,7 +3237,7 @@
           <a:p>
             <a:fld id="{82F288E0-7875-42C4-84C8-98DBBD3BF4D2}" type="datetimeFigureOut">
               <a:rPr lang="zh-CN" altLang="en-US" smtClean="0"/>
-              <a:t>2023/3/9</a:t>
+              <a:t>2023/3/11</a:t>
             </a:fld>
             <a:endParaRPr lang="zh-CN" altLang="en-US"/>
           </a:p>
@@ -3330,7 +3422,7 @@
           <a:p>
             <a:fld id="{82F288E0-7875-42C4-84C8-98DBBD3BF4D2}" type="datetimeFigureOut">
               <a:rPr lang="zh-CN" altLang="en-US" smtClean="0"/>
-              <a:t>2023/3/9</a:t>
+              <a:t>2023/3/11</a:t>
             </a:fld>
             <a:endParaRPr lang="zh-CN" altLang="en-US"/>
           </a:p>
@@ -3557,7 +3649,7 @@
           <a:p>
             <a:fld id="{82F288E0-7875-42C4-84C8-98DBBD3BF4D2}" type="datetimeFigureOut">
               <a:rPr lang="zh-CN" altLang="en-US" smtClean="0"/>
-              <a:t>2023/3/9</a:t>
+              <a:t>2023/3/11</a:t>
             </a:fld>
             <a:endParaRPr lang="zh-CN" altLang="en-US"/>
           </a:p>
@@ -4085,7 +4177,7 @@
           <a:graphicData uri="http://schemas.openxmlformats.org/presentationml/2006/ole">
             <mc:AlternateContent xmlns:mc="http://schemas.openxmlformats.org/markup-compatibility/2006">
               <mc:Choice xmlns:v="urn:schemas-microsoft-com:vml" Requires="v">
-                <p:oleObj spid="_x0000_s4100" name="Picture" r:id="rId3" imgW="2441520" imgH="3979440" progId="Word.Picture.8">
+                <p:oleObj spid="_x0000_s4112" name="Picture" r:id="rId3" imgW="2441520" imgH="3979440" progId="Word.Picture.8">
                   <p:embed/>
                 </p:oleObj>
               </mc:Choice>
@@ -4234,7 +4326,7 @@
         <p:spPr bwMode="auto">
           <a:xfrm>
             <a:off x="241300" y="222250"/>
-            <a:ext cx="8674099" cy="4629924"/>
+            <a:ext cx="8674099" cy="4311650"/>
           </a:xfrm>
           <a:prstGeom prst="rect">
             <a:avLst/>
@@ -4269,6 +4361,54 @@
           </a:extLst>
         </p:spPr>
       </p:pic>
+      <p:sp>
+        <p:nvSpPr>
+          <p:cNvPr id="2" name="Rectangle 1"/>
+          <p:cNvSpPr/>
+          <p:nvPr/>
+        </p:nvSpPr>
+        <p:spPr>
+          <a:xfrm>
+            <a:off x="5767526" y="4533900"/>
+            <a:ext cx="3057247" cy="307777"/>
+          </a:xfrm>
+          <a:prstGeom prst="rect">
+            <a:avLst/>
+          </a:prstGeom>
+        </p:spPr>
+        <p:txBody>
+          <a:bodyPr wrap="none">
+            <a:spAutoFit/>
+          </a:bodyPr>
+          <a:lstStyle/>
+          <a:p>
+            <a:r>
+              <a:rPr lang="zh-CN" altLang="en-US" kern="100" dirty="0">
+                <a:latin typeface="Calibri" panose="020F0502020204030204" pitchFamily="34" charset="0"/>
+                <a:ea typeface="宋体" panose="02010600030101010101" pitchFamily="2" charset="-122"/>
+                <a:cs typeface="Times New Roman" panose="02020603050405020304" pitchFamily="18" charset="0"/>
+              </a:rPr>
+              <a:t>（</a:t>
+            </a:r>
+            <a:r>
+              <a:rPr lang="zh-CN" altLang="en-US" kern="100" dirty="0">
+                <a:ea typeface="黑体" panose="02010609060101010101" pitchFamily="49" charset="-122"/>
+                <a:cs typeface="Times New Roman" panose="02020603050405020304" pitchFamily="18" charset="0"/>
+              </a:rPr>
+              <a:t>思政要素：学习兴趣、国家情怀</a:t>
+            </a:r>
+            <a:r>
+              <a:rPr lang="zh-CN" altLang="en-US" kern="100" dirty="0">
+                <a:latin typeface="Calibri" panose="020F0502020204030204" pitchFamily="34" charset="0"/>
+                <a:ea typeface="宋体" panose="02010600030101010101" pitchFamily="2" charset="-122"/>
+                <a:cs typeface="Times New Roman" panose="02020603050405020304" pitchFamily="18" charset="0"/>
+              </a:rPr>
+              <a:t>）</a:t>
+            </a:r>
+            <a:endParaRPr lang="en-US" dirty="0"/>
+          </a:p>
+        </p:txBody>
+      </p:sp>
     </p:spTree>
     <p:extLst>
       <p:ext uri="{BB962C8B-B14F-4D97-AF65-F5344CB8AC3E}">
@@ -4326,7 +4466,7 @@
         </p:nvSpPr>
         <p:spPr>
           <a:xfrm>
-            <a:off x="580032" y="631513"/>
+            <a:off x="510182" y="523563"/>
             <a:ext cx="3134718" cy="369332"/>
           </a:xfrm>
           <a:prstGeom prst="rect">
@@ -4362,8 +4502,8 @@
         </p:nvSpPr>
         <p:spPr>
           <a:xfrm>
-            <a:off x="580032" y="1271398"/>
-            <a:ext cx="7967068" cy="4239622"/>
+            <a:off x="580032" y="1138048"/>
+            <a:ext cx="8132168" cy="3901068"/>
           </a:xfrm>
           <a:prstGeom prst="rect">
             <a:avLst/>
@@ -4621,7 +4761,17 @@
                 <a:latin typeface="微软雅黑" panose="020B0503020204020204" pitchFamily="34" charset="-122"/>
                 <a:ea typeface="微软雅黑" panose="020B0503020204020204" pitchFamily="34" charset="-122"/>
               </a:rPr>
-              <a:t>技能。</a:t>
+              <a:t>技能</a:t>
+            </a:r>
+            <a:r>
+              <a:rPr lang="zh-CN" altLang="en-US" sz="2200" dirty="0" smtClean="0">
+                <a:solidFill>
+                  <a:srgbClr val="19B49B"/>
+                </a:solidFill>
+                <a:latin typeface="微软雅黑" panose="020B0503020204020204" pitchFamily="34" charset="-122"/>
+                <a:ea typeface="微软雅黑" panose="020B0503020204020204" pitchFamily="34" charset="-122"/>
+              </a:rPr>
+              <a:t>。</a:t>
             </a:r>
             <a:endParaRPr lang="en-US" sz="2200" dirty="0">
               <a:solidFill>
@@ -4647,6 +4797,54 @@
               <a:latin typeface="微软雅黑" panose="020B0503020204020204" pitchFamily="34" charset="-122"/>
               <a:ea typeface="微软雅黑" panose="020B0503020204020204" pitchFamily="34" charset="-122"/>
             </a:endParaRPr>
+          </a:p>
+        </p:txBody>
+      </p:sp>
+      <p:sp>
+        <p:nvSpPr>
+          <p:cNvPr id="2" name="Rectangle 1"/>
+          <p:cNvSpPr/>
+          <p:nvPr/>
+        </p:nvSpPr>
+        <p:spPr>
+          <a:xfrm>
+            <a:off x="6188983" y="4441195"/>
+            <a:ext cx="2441694" cy="261610"/>
+          </a:xfrm>
+          <a:prstGeom prst="rect">
+            <a:avLst/>
+          </a:prstGeom>
+        </p:spPr>
+        <p:txBody>
+          <a:bodyPr wrap="none">
+            <a:spAutoFit/>
+          </a:bodyPr>
+          <a:lstStyle/>
+          <a:p>
+            <a:r>
+              <a:rPr lang="zh-CN" altLang="en-US" sz="1100" b="1" kern="100" dirty="0" smtClean="0">
+                <a:latin typeface="Calibri" panose="020F0502020204030204" pitchFamily="34" charset="0"/>
+                <a:ea typeface="宋体" panose="02010600030101010101" pitchFamily="2" charset="-122"/>
+                <a:cs typeface="Times New Roman" panose="02020603050405020304" pitchFamily="18" charset="0"/>
+              </a:rPr>
+              <a:t>（</a:t>
+            </a:r>
+            <a:r>
+              <a:rPr lang="zh-CN" altLang="en-US" sz="1100" b="1" kern="100" dirty="0">
+                <a:ea typeface="黑体" panose="02010609060101010101" pitchFamily="49" charset="-122"/>
+                <a:cs typeface="Times New Roman" panose="02020603050405020304" pitchFamily="18" charset="0"/>
+              </a:rPr>
+              <a:t>思政要素：学思结合、实事求是</a:t>
+            </a:r>
+            <a:r>
+              <a:rPr lang="zh-CN" altLang="en-US" sz="1100" b="1" kern="100" dirty="0">
+                <a:latin typeface="Calibri" panose="020F0502020204030204" pitchFamily="34" charset="0"/>
+                <a:ea typeface="宋体" panose="02010600030101010101" pitchFamily="2" charset="-122"/>
+                <a:cs typeface="Times New Roman" panose="02020603050405020304" pitchFamily="18" charset="0"/>
+              </a:rPr>
+              <a:t>）</a:t>
+            </a:r>
+            <a:endParaRPr lang="en-US" b="1" dirty="0"/>
           </a:p>
         </p:txBody>
       </p:sp>
@@ -4770,7 +4968,7 @@
               <a:buChar char="•"/>
             </a:pPr>
             <a:r>
-              <a:rPr lang="zh-CN" altLang="en-US" sz="2800" dirty="0" smtClean="0">
+              <a:rPr lang="zh-CN" altLang="en-US" sz="2700" dirty="0" smtClean="0">
                 <a:solidFill>
                   <a:srgbClr val="19B49B"/>
                 </a:solidFill>
@@ -4780,7 +4978,7 @@
               <a:t>（</a:t>
             </a:r>
             <a:r>
-              <a:rPr lang="zh-CN" altLang="en-US" sz="2800" dirty="0">
+              <a:rPr lang="zh-CN" altLang="en-US" sz="2700" dirty="0">
                 <a:solidFill>
                   <a:srgbClr val="19B49B"/>
                 </a:solidFill>
@@ -4790,7 +4988,7 @@
               <a:t>面向远古时代的）计算思维本质，即 ：“人脑的字符</a:t>
             </a:r>
             <a:r>
-              <a:rPr lang="en-US" sz="2800" dirty="0">
+              <a:rPr lang="en-US" sz="2700" dirty="0">
                 <a:solidFill>
                   <a:srgbClr val="19B49B"/>
                 </a:solidFill>
@@ -4800,7 +4998,7 @@
               <a:t>/</a:t>
             </a:r>
             <a:r>
-              <a:rPr lang="zh-CN" altLang="en-US" sz="2800" dirty="0">
+              <a:rPr lang="zh-CN" altLang="en-US" sz="2700" dirty="0">
                 <a:solidFill>
                   <a:srgbClr val="19B49B"/>
                 </a:solidFill>
@@ -4810,7 +5008,7 @@
               <a:t>非字符的语言”</a:t>
             </a:r>
             <a:r>
-              <a:rPr lang="zh-CN" altLang="en-US" sz="2800" dirty="0" smtClean="0">
+              <a:rPr lang="zh-CN" altLang="en-US" sz="2700" dirty="0" smtClean="0">
                 <a:solidFill>
                   <a:srgbClr val="19B49B"/>
                 </a:solidFill>
@@ -4819,7 +5017,7 @@
               </a:rPr>
               <a:t>。</a:t>
             </a:r>
-            <a:endParaRPr lang="en-US" altLang="zh-CN" sz="2800" dirty="0" smtClean="0">
+            <a:endParaRPr lang="en-US" altLang="zh-CN" sz="2700" dirty="0" smtClean="0">
               <a:solidFill>
                 <a:srgbClr val="19B49B"/>
               </a:solidFill>
@@ -4842,7 +5040,7 @@
               <a:buChar char="•"/>
             </a:pPr>
             <a:r>
-              <a:rPr lang="zh-CN" altLang="en-US" sz="2800" dirty="0">
+              <a:rPr lang="zh-CN" altLang="en-US" sz="2700" dirty="0">
                 <a:solidFill>
                   <a:srgbClr val="0070C0"/>
                 </a:solidFill>
@@ -4852,7 +5050,7 @@
               <a:t>（面向图灵数字化计算时代的）计算思维本质，即：“计算机的</a:t>
             </a:r>
             <a:r>
-              <a:rPr lang="en-US" altLang="zh-CN" sz="2800" dirty="0">
+              <a:rPr lang="en-US" altLang="zh-CN" sz="2700" dirty="0">
                 <a:solidFill>
                   <a:srgbClr val="0070C0"/>
                 </a:solidFill>
@@ -4862,7 +5060,7 @@
               <a:t>0/1</a:t>
             </a:r>
             <a:r>
-              <a:rPr lang="zh-CN" altLang="en-US" sz="2800" dirty="0">
+              <a:rPr lang="zh-CN" altLang="en-US" sz="2700" dirty="0">
                 <a:solidFill>
                   <a:srgbClr val="0070C0"/>
                 </a:solidFill>
@@ -4871,7 +5069,7 @@
               </a:rPr>
               <a:t>的语言”。</a:t>
             </a:r>
-            <a:endParaRPr lang="en-US" altLang="zh-CN" sz="2800" dirty="0">
+            <a:endParaRPr lang="en-US" altLang="zh-CN" sz="2700" dirty="0">
               <a:solidFill>
                 <a:srgbClr val="0070C0"/>
               </a:solidFill>
@@ -4894,7 +5092,7 @@
               <a:buChar char="•"/>
             </a:pPr>
             <a:r>
-              <a:rPr lang="zh-CN" altLang="en-US" sz="2800" dirty="0">
+              <a:rPr lang="zh-CN" altLang="en-US" sz="2700" dirty="0">
                 <a:solidFill>
                   <a:srgbClr val="00B0F0"/>
                 </a:solidFill>
@@ -4904,7 +5102,7 @@
               <a:t>（面向当前数字化计算时代的）计算思维的本质，即：“计算机</a:t>
             </a:r>
             <a:r>
-              <a:rPr lang="en-US" altLang="zh-CN" sz="2800" dirty="0">
+              <a:rPr lang="en-US" altLang="zh-CN" sz="2700" dirty="0">
                 <a:solidFill>
                   <a:srgbClr val="00B0F0"/>
                 </a:solidFill>
@@ -4914,7 +5112,7 @@
               <a:t>CPU</a:t>
             </a:r>
             <a:r>
-              <a:rPr lang="zh-CN" altLang="en-US" sz="2800" dirty="0">
+              <a:rPr lang="zh-CN" altLang="en-US" sz="2700" dirty="0">
                 <a:solidFill>
                   <a:srgbClr val="00B0F0"/>
                 </a:solidFill>
@@ -4924,7 +5122,7 @@
               <a:t>平台的</a:t>
             </a:r>
             <a:r>
-              <a:rPr lang="en-US" altLang="zh-CN" sz="2800" dirty="0">
+              <a:rPr lang="en-US" altLang="zh-CN" sz="2700" dirty="0">
                 <a:solidFill>
                   <a:srgbClr val="00B0F0"/>
                 </a:solidFill>
@@ -4934,7 +5132,7 @@
               <a:t>0/1</a:t>
             </a:r>
             <a:r>
-              <a:rPr lang="zh-CN" altLang="en-US" sz="2800" dirty="0">
+              <a:rPr lang="zh-CN" altLang="en-US" sz="2700" dirty="0">
                 <a:solidFill>
                   <a:srgbClr val="00B0F0"/>
                 </a:solidFill>
@@ -4944,7 +5142,7 @@
               <a:t>语言”隐喻“人脑平台的字符</a:t>
             </a:r>
             <a:r>
-              <a:rPr lang="en-US" altLang="zh-CN" sz="2800" dirty="0">
+              <a:rPr lang="en-US" altLang="zh-CN" sz="2700" dirty="0">
                 <a:solidFill>
                   <a:srgbClr val="00B0F0"/>
                 </a:solidFill>
@@ -4954,7 +5152,7 @@
               <a:t>/</a:t>
             </a:r>
             <a:r>
-              <a:rPr lang="zh-CN" altLang="en-US" sz="2800" dirty="0">
+              <a:rPr lang="zh-CN" altLang="en-US" sz="2700" dirty="0">
                 <a:solidFill>
                   <a:srgbClr val="00B0F0"/>
                 </a:solidFill>
@@ -4963,13 +5161,68 @@
               </a:rPr>
               <a:t>非字符语言”。</a:t>
             </a:r>
-            <a:endParaRPr lang="en-US" sz="2800" dirty="0">
+            <a:endParaRPr lang="en-US" sz="2700" dirty="0">
               <a:solidFill>
                 <a:srgbClr val="00B0F0"/>
               </a:solidFill>
               <a:latin typeface="微软雅黑" panose="020B0503020204020204" pitchFamily="34" charset="-122"/>
               <a:ea typeface="微软雅黑" panose="020B0503020204020204" pitchFamily="34" charset="-122"/>
             </a:endParaRPr>
+          </a:p>
+        </p:txBody>
+      </p:sp>
+      <p:sp>
+        <p:nvSpPr>
+          <p:cNvPr id="4" name="Rectangle 3"/>
+          <p:cNvSpPr/>
+          <p:nvPr/>
+        </p:nvSpPr>
+        <p:spPr>
+          <a:xfrm>
+            <a:off x="2831268" y="4559477"/>
+            <a:ext cx="6109365" cy="307777"/>
+          </a:xfrm>
+          <a:prstGeom prst="rect">
+            <a:avLst/>
+          </a:prstGeom>
+        </p:spPr>
+        <p:txBody>
+          <a:bodyPr wrap="none">
+            <a:spAutoFit/>
+          </a:bodyPr>
+          <a:lstStyle/>
+          <a:p>
+            <a:r>
+              <a:rPr lang="zh-CN" altLang="en-US" kern="100" dirty="0" smtClean="0">
+                <a:latin typeface="Calibri" panose="020F0502020204030204" pitchFamily="34" charset="0"/>
+                <a:ea typeface="宋体" panose="02010600030101010101" pitchFamily="2" charset="-122"/>
+                <a:cs typeface="Times New Roman" panose="02020603050405020304" pitchFamily="18" charset="0"/>
+              </a:rPr>
+              <a:t>（思政要素：</a:t>
+            </a:r>
+            <a:r>
+              <a:rPr lang="zh-CN" altLang="en-US" kern="100" dirty="0" smtClean="0">
+                <a:ea typeface="黑体" panose="02010609060101010101" pitchFamily="49" charset="-122"/>
+                <a:cs typeface="Times New Roman" panose="02020603050405020304" pitchFamily="18" charset="0"/>
+              </a:rPr>
+              <a:t>正确</a:t>
+            </a:r>
+            <a:r>
+              <a:rPr lang="zh-CN" altLang="en-US" kern="100" dirty="0">
+                <a:ea typeface="黑体" panose="02010609060101010101" pitchFamily="49" charset="-122"/>
+                <a:cs typeface="Times New Roman" panose="02020603050405020304" pitchFamily="18" charset="0"/>
+              </a:rPr>
+              <a:t>认识问题、分析问题、解决问题、科学思维、科学伦理</a:t>
+            </a:r>
+            <a:r>
+              <a:rPr lang="zh-CN" altLang="en-US" kern="100" dirty="0" smtClean="0">
+                <a:latin typeface="Calibri" panose="020F0502020204030204" pitchFamily="34" charset="0"/>
+                <a:ea typeface="宋体" panose="02010600030101010101" pitchFamily="2" charset="-122"/>
+                <a:cs typeface="Times New Roman" panose="02020603050405020304" pitchFamily="18" charset="0"/>
+              </a:rPr>
+              <a:t>）</a:t>
+            </a:r>
+            <a:endParaRPr lang="en-US" dirty="0"/>
           </a:p>
         </p:txBody>
       </p:sp>
@@ -5513,6 +5766,53 @@
           </a:prstGeom>
         </p:spPr>
       </p:pic>
+      <p:sp>
+        <p:nvSpPr>
+          <p:cNvPr id="8" name="Rectangle 7"/>
+          <p:cNvSpPr/>
+          <p:nvPr/>
+        </p:nvSpPr>
+        <p:spPr>
+          <a:xfrm>
+            <a:off x="5699003" y="436849"/>
+            <a:ext cx="3057247" cy="307777"/>
+          </a:xfrm>
+          <a:prstGeom prst="rect">
+            <a:avLst/>
+          </a:prstGeom>
+        </p:spPr>
+        <p:txBody>
+          <a:bodyPr wrap="none">
+            <a:spAutoFit/>
+          </a:bodyPr>
+          <a:lstStyle/>
+          <a:p>
+            <a:r>
+              <a:rPr lang="zh-CN" altLang="en-US" kern="100" dirty="0">
+                <a:latin typeface="Calibri" panose="020F0502020204030204" pitchFamily="34" charset="0"/>
+                <a:ea typeface="宋体" panose="02010600030101010101" pitchFamily="2" charset="-122"/>
+                <a:cs typeface="Times New Roman" panose="02020603050405020304" pitchFamily="18" charset="0"/>
+              </a:rPr>
+              <a:t>（</a:t>
+            </a:r>
+            <a:r>
+              <a:rPr lang="zh-CN" altLang="en-US" kern="100" dirty="0">
+                <a:ea typeface="黑体" panose="02010609060101010101" pitchFamily="49" charset="-122"/>
+                <a:cs typeface="Times New Roman" panose="02020603050405020304" pitchFamily="18" charset="0"/>
+              </a:rPr>
+              <a:t>思政要素：大国工匠、</a:t>
+            </a:r>
+            <a:r>
+              <a:rPr lang="zh-CN" altLang="en-US" kern="100" dirty="0" smtClean="0">
+                <a:ea typeface="黑体" panose="02010609060101010101" pitchFamily="49" charset="-122"/>
+                <a:cs typeface="Times New Roman" panose="02020603050405020304" pitchFamily="18" charset="0"/>
+              </a:rPr>
+              <a:t>精益求精）</a:t>
+            </a:r>
+            <a:endParaRPr lang="en-US" dirty="0"/>
+          </a:p>
+        </p:txBody>
+      </p:sp>
     </p:spTree>
     <p:extLst>
       <p:ext uri="{BB962C8B-B14F-4D97-AF65-F5344CB8AC3E}">
@@ -5825,6 +6125,46 @@
                 <a:srgbClr val="00B050"/>
               </a:solidFill>
             </a:endParaRPr>
+          </a:p>
+        </p:txBody>
+      </p:sp>
+      <p:sp>
+        <p:nvSpPr>
+          <p:cNvPr id="6" name="Rectangle 5"/>
+          <p:cNvSpPr/>
+          <p:nvPr/>
+        </p:nvSpPr>
+        <p:spPr>
+          <a:xfrm>
+            <a:off x="5699003" y="436849"/>
+            <a:ext cx="3057247" cy="307777"/>
+          </a:xfrm>
+          <a:prstGeom prst="rect">
+            <a:avLst/>
+          </a:prstGeom>
+        </p:spPr>
+        <p:txBody>
+          <a:bodyPr wrap="none">
+            <a:spAutoFit/>
+          </a:bodyPr>
+          <a:lstStyle/>
+          <a:p>
+            <a:r>
+              <a:rPr lang="zh-CN" altLang="en-US" kern="100" dirty="0">
+                <a:latin typeface="Calibri" panose="020F0502020204030204" pitchFamily="34" charset="0"/>
+                <a:ea typeface="宋体" panose="02010600030101010101" pitchFamily="2" charset="-122"/>
+                <a:cs typeface="Times New Roman" panose="02020603050405020304" pitchFamily="18" charset="0"/>
+              </a:rPr>
+              <a:t>（</a:t>
+            </a:r>
+            <a:r>
+              <a:rPr lang="zh-CN" altLang="en-US" kern="100" dirty="0">
+                <a:ea typeface="黑体" panose="02010609060101010101" pitchFamily="49" charset="-122"/>
+                <a:cs typeface="Times New Roman" panose="02020603050405020304" pitchFamily="18" charset="0"/>
+              </a:rPr>
+              <a:t>思政要素：国家情怀、文化自信）</a:t>
+            </a:r>
+            <a:endParaRPr lang="en-US" dirty="0"/>
           </a:p>
         </p:txBody>
       </p:sp>
@@ -5892,7 +6232,7 @@
         </p:blipFill>
         <p:spPr>
           <a:xfrm rot="20538853">
-            <a:off x="530689" y="2458929"/>
+            <a:off x="549739" y="2288944"/>
             <a:ext cx="2495550" cy="2006600"/>
           </a:xfrm>
           <a:prstGeom prst="rect">
@@ -5923,7 +6263,7 @@
         </p:blipFill>
         <p:spPr bwMode="auto">
           <a:xfrm rot="525433">
-            <a:off x="6559549" y="2468561"/>
+            <a:off x="6610350" y="2344233"/>
             <a:ext cx="2095500" cy="2095501"/>
           </a:xfrm>
           <a:prstGeom prst="rect">
@@ -6076,6 +6416,74 @@
               <a:latin typeface="微软雅黑" panose="020B0503020204020204" pitchFamily="34" charset="-122"/>
               <a:ea typeface="微软雅黑" panose="020B0503020204020204" pitchFamily="34" charset="-122"/>
             </a:endParaRPr>
+          </a:p>
+        </p:txBody>
+      </p:sp>
+      <p:sp>
+        <p:nvSpPr>
+          <p:cNvPr id="6" name="Rectangle 5"/>
+          <p:cNvSpPr/>
+          <p:nvPr/>
+        </p:nvSpPr>
+        <p:spPr>
+          <a:xfrm>
+            <a:off x="5699003" y="436849"/>
+            <a:ext cx="3057247" cy="307777"/>
+          </a:xfrm>
+          <a:prstGeom prst="rect">
+            <a:avLst/>
+          </a:prstGeom>
+        </p:spPr>
+        <p:txBody>
+          <a:bodyPr wrap="none">
+            <a:spAutoFit/>
+          </a:bodyPr>
+          <a:lstStyle/>
+          <a:p>
+            <a:r>
+              <a:rPr lang="zh-CN" altLang="en-US" kern="100" dirty="0">
+                <a:latin typeface="Calibri" panose="020F0502020204030204" pitchFamily="34" charset="0"/>
+                <a:ea typeface="宋体" panose="02010600030101010101" pitchFamily="2" charset="-122"/>
+                <a:cs typeface="Times New Roman" panose="02020603050405020304" pitchFamily="18" charset="0"/>
+              </a:rPr>
+              <a:t>（</a:t>
+            </a:r>
+            <a:r>
+              <a:rPr lang="zh-CN" altLang="en-US" kern="100" dirty="0">
+                <a:ea typeface="黑体" panose="02010609060101010101" pitchFamily="49" charset="-122"/>
+                <a:cs typeface="Times New Roman" panose="02020603050405020304" pitchFamily="18" charset="0"/>
+              </a:rPr>
+              <a:t>思政要素</a:t>
+            </a:r>
+            <a:r>
+              <a:rPr lang="zh-CN" altLang="en-US" kern="100" dirty="0" smtClean="0">
+                <a:ea typeface="黑体" panose="02010609060101010101" pitchFamily="49" charset="-122"/>
+                <a:cs typeface="Times New Roman" panose="02020603050405020304" pitchFamily="18" charset="0"/>
+              </a:rPr>
+              <a:t>：辩证</a:t>
+            </a:r>
+            <a:r>
+              <a:rPr lang="zh-CN" altLang="en-US" kern="100" dirty="0">
+                <a:ea typeface="黑体" panose="02010609060101010101" pitchFamily="49" charset="-122"/>
+                <a:cs typeface="Times New Roman" panose="02020603050405020304" pitchFamily="18" charset="0"/>
+              </a:rPr>
+              <a:t>思辨</a:t>
+            </a:r>
+            <a:r>
+              <a:rPr lang="zh-CN" altLang="en-US" kern="100" dirty="0" smtClean="0">
+                <a:ea typeface="黑体" panose="02010609060101010101" pitchFamily="49" charset="-122"/>
+                <a:cs typeface="Times New Roman" panose="02020603050405020304" pitchFamily="18" charset="0"/>
+              </a:rPr>
+              <a:t>、自主</a:t>
+            </a:r>
+            <a:r>
+              <a:rPr lang="zh-CN" altLang="en-US" kern="100" dirty="0">
+                <a:ea typeface="黑体" panose="02010609060101010101" pitchFamily="49" charset="-122"/>
+                <a:cs typeface="Times New Roman" panose="02020603050405020304" pitchFamily="18" charset="0"/>
+              </a:rPr>
+              <a:t>优化）</a:t>
+            </a:r>
+            <a:endParaRPr lang="en-US" dirty="0"/>
           </a:p>
         </p:txBody>
       </p:sp>
@@ -6169,7 +6577,7 @@
           <p:cNvPr id="2" name="文本框 1">
             <a:extLst>
               <a:ext uri="{FF2B5EF4-FFF2-40B4-BE49-F238E27FC236}">
-                <a16:creationId xmlns="" xmlns:a16="http://schemas.microsoft.com/office/drawing/2014/main" id="{438813D7-676E-4BB1-8BD1-AA790C109740}"/>
+                <a16:creationId xmlns:a16="http://schemas.microsoft.com/office/drawing/2014/main" xmlns="" id="{438813D7-676E-4BB1-8BD1-AA790C109740}"/>
               </a:ext>
             </a:extLst>
           </p:cNvPr>
@@ -6178,8 +6586,8 @@
         </p:nvSpPr>
         <p:spPr>
           <a:xfrm>
-            <a:off x="2996820" y="4301969"/>
-            <a:ext cx="3010788" cy="307777"/>
+            <a:off x="4787900" y="4346419"/>
+            <a:ext cx="3810508" cy="307777"/>
           </a:xfrm>
           <a:prstGeom prst="rect">
             <a:avLst/>
@@ -6193,8 +6601,12 @@
           <a:lstStyle/>
           <a:p>
             <a:r>
-              <a:rPr lang="zh-CN" altLang="en-US" b="1" dirty="0"/>
-              <a:t>（学思结合、知行统一、实事求是）</a:t>
+              <a:rPr lang="zh-CN" altLang="en-US" dirty="0" smtClean="0"/>
+              <a:t>（思政要素：学</a:t>
+            </a:r>
+            <a:r>
+              <a:rPr lang="zh-CN" altLang="en-US" dirty="0"/>
+              <a:t>思结合、知行统一、实事求是）</a:t>
             </a:r>
           </a:p>
         </p:txBody>
